--- a/data/deep_dives/carteira_farmtech_key_accounts_d0cb4fa8/exports/documentary_comparison.pptx
+++ b/data/deep_dives/carteira_farmtech_key_accounts_d0cb4fa8/exports/documentary_comparison.pptx
@@ -4281,7 +4281,7 @@
                       <a:r>
                         <a:rPr sz="1300" b="1">
                           <a:solidFill>
-                            <a:srgbClr val="1F1F1F"/>
+                            <a:srgbClr val="FFFFFF"/>
                           </a:solidFill>
                           <a:latin typeface="Calibri"/>
                         </a:rPr>
@@ -4291,7 +4291,7 @@
                   </a:txBody>
                   <a:tcPr marL="91440" marR="91440" marT="41148" marB="41148" anchor="ctr">
                     <a:solidFill>
-                      <a:srgbClr val="EC7000"/>
+                      <a:srgbClr val="FF6200"/>
                     </a:solidFill>
                     <a:lnL>
                       <a:noFill/>
@@ -4330,7 +4330,7 @@
                       <a:r>
                         <a:rPr sz="1300" b="1">
                           <a:solidFill>
-                            <a:srgbClr val="1F1F1F"/>
+                            <a:srgbClr val="FFFFFF"/>
                           </a:solidFill>
                           <a:latin typeface="Calibri"/>
                         </a:rPr>
@@ -4340,7 +4340,7 @@
                   </a:txBody>
                   <a:tcPr marL="91440" marR="91440" marT="41148" marB="41148" anchor="ctr">
                     <a:solidFill>
-                      <a:srgbClr val="EC7000"/>
+                      <a:srgbClr val="FF6200"/>
                     </a:solidFill>
                     <a:lnL>
                       <a:noFill/>
@@ -4528,7 +4528,7 @@
                           </a:solidFill>
                           <a:latin typeface="Calibri"/>
                         </a:rPr>
-                        <a:t>Não localizado nas fontes acessíveis desta leitura</a:t>
+                        <a:t>-</a:t>
                       </a:r>
                     </a:p>
                   </a:txBody>
@@ -4624,7 +4624,7 @@
                           </a:solidFill>
                           <a:latin typeface="Calibri"/>
                         </a:rPr>
-                        <a:t>Não localizado nas fontes acessíveis desta leitura</a:t>
+                        <a:t>-</a:t>
                       </a:r>
                     </a:p>
                   </a:txBody>
@@ -4720,7 +4720,7 @@
                           </a:solidFill>
                           <a:latin typeface="Calibri"/>
                         </a:rPr>
-                        <a:t>Não localizado nas fontes acessíveis desta leitura</a:t>
+                        <a:t>-</a:t>
                       </a:r>
                     </a:p>
                   </a:txBody>
@@ -5140,7 +5140,7 @@
                       <a:r>
                         <a:rPr sz="1300" b="1">
                           <a:solidFill>
-                            <a:srgbClr val="1F1F1F"/>
+                            <a:srgbClr val="FFFFFF"/>
                           </a:solidFill>
                           <a:latin typeface="Calibri"/>
                         </a:rPr>
@@ -5150,7 +5150,7 @@
                   </a:txBody>
                   <a:tcPr marL="91440" marR="91440" marT="41148" marB="41148" anchor="ctr">
                     <a:solidFill>
-                      <a:srgbClr val="EC7000"/>
+                      <a:srgbClr val="FF6200"/>
                     </a:solidFill>
                     <a:lnL>
                       <a:noFill/>
@@ -5189,7 +5189,7 @@
                       <a:r>
                         <a:rPr sz="1300" b="1">
                           <a:solidFill>
-                            <a:srgbClr val="1F1F1F"/>
+                            <a:srgbClr val="FFFFFF"/>
                           </a:solidFill>
                           <a:latin typeface="Calibri"/>
                         </a:rPr>
@@ -5199,7 +5199,7 @@
                   </a:txBody>
                   <a:tcPr marL="91440" marR="91440" marT="41148" marB="41148" anchor="ctr">
                     <a:solidFill>
-                      <a:srgbClr val="EC7000"/>
+                      <a:srgbClr val="FF6200"/>
                     </a:solidFill>
                     <a:lnL>
                       <a:noFill/>
@@ -5743,7 +5743,7 @@
                           </a:solidFill>
                           <a:latin typeface="Calibri"/>
                         </a:rPr>
-                        <a:t>Não localizado nas fontes acessíveis desta leitura</a:t>
+                        <a:t>-</a:t>
                       </a:r>
                     </a:p>
                   </a:txBody>
@@ -5947,7 +5947,7 @@
                       <a:r>
                         <a:rPr sz="1300" b="1">
                           <a:solidFill>
-                            <a:srgbClr val="1F1F1F"/>
+                            <a:srgbClr val="FFFFFF"/>
                           </a:solidFill>
                           <a:latin typeface="Calibri"/>
                         </a:rPr>
@@ -5957,7 +5957,7 @@
                   </a:txBody>
                   <a:tcPr marL="91440" marR="91440" marT="41148" marB="41148" anchor="ctr">
                     <a:solidFill>
-                      <a:srgbClr val="EC7000"/>
+                      <a:srgbClr val="FF6200"/>
                     </a:solidFill>
                     <a:lnL>
                       <a:noFill/>
@@ -5996,7 +5996,7 @@
                       <a:r>
                         <a:rPr sz="1300" b="1">
                           <a:solidFill>
-                            <a:srgbClr val="1F1F1F"/>
+                            <a:srgbClr val="FFFFFF"/>
                           </a:solidFill>
                           <a:latin typeface="Calibri"/>
                         </a:rPr>
@@ -6006,7 +6006,7 @@
                   </a:txBody>
                   <a:tcPr marL="91440" marR="91440" marT="41148" marB="41148" anchor="ctr">
                     <a:solidFill>
-                      <a:srgbClr val="EC7000"/>
+                      <a:srgbClr val="FF6200"/>
                     </a:solidFill>
                     <a:lnL>
                       <a:noFill/>
@@ -6290,7 +6290,7 @@
                           </a:solidFill>
                           <a:latin typeface="Calibri"/>
                         </a:rPr>
-                        <a:t>Não localizado nas fontes acessíveis desta leitura</a:t>
+                        <a:t>-</a:t>
                       </a:r>
                     </a:p>
                   </a:txBody>
@@ -6504,7 +6504,7 @@
                           </a:solidFill>
                           <a:latin typeface="Calibri"/>
                         </a:rPr>
-                        <a:t>Não localizado nas fontes acessíveis desta leitura</a:t>
+                        <a:t>-</a:t>
                       </a:r>
                     </a:p>
                   </a:txBody>
@@ -6602,7 +6602,7 @@
                           </a:solidFill>
                           <a:latin typeface="Calibri"/>
                         </a:rPr>
-                        <a:t>Não localizado nas fontes acessíveis desta leitura</a:t>
+                        <a:t>-</a:t>
                       </a:r>
                     </a:p>
                   </a:txBody>
@@ -6806,7 +6806,7 @@
                       <a:r>
                         <a:rPr sz="1300" b="1">
                           <a:solidFill>
-                            <a:srgbClr val="1F1F1F"/>
+                            <a:srgbClr val="FFFFFF"/>
                           </a:solidFill>
                           <a:latin typeface="Calibri"/>
                         </a:rPr>
@@ -6816,7 +6816,7 @@
                   </a:txBody>
                   <a:tcPr marL="91440" marR="91440" marT="41148" marB="41148" anchor="ctr">
                     <a:solidFill>
-                      <a:srgbClr val="EC7000"/>
+                      <a:srgbClr val="FF6200"/>
                     </a:solidFill>
                     <a:lnL>
                       <a:noFill/>
@@ -6855,7 +6855,7 @@
                       <a:r>
                         <a:rPr sz="1300" b="1">
                           <a:solidFill>
-                            <a:srgbClr val="1F1F1F"/>
+                            <a:srgbClr val="FFFFFF"/>
                           </a:solidFill>
                           <a:latin typeface="Calibri"/>
                         </a:rPr>
@@ -6865,7 +6865,7 @@
                   </a:txBody>
                   <a:tcPr marL="91440" marR="91440" marT="41148" marB="41148" anchor="ctr">
                     <a:solidFill>
-                      <a:srgbClr val="EC7000"/>
+                      <a:srgbClr val="FF6200"/>
                     </a:solidFill>
                     <a:lnL>
                       <a:noFill/>
@@ -7451,7 +7451,7 @@
                       <a:r>
                         <a:rPr sz="1300" b="1">
                           <a:solidFill>
-                            <a:srgbClr val="1F1F1F"/>
+                            <a:srgbClr val="FFFFFF"/>
                           </a:solidFill>
                           <a:latin typeface="Calibri"/>
                         </a:rPr>
@@ -7461,7 +7461,7 @@
                   </a:txBody>
                   <a:tcPr marL="91440" marR="91440" marT="41148" marB="41148" anchor="ctr">
                     <a:solidFill>
-                      <a:srgbClr val="EC7000"/>
+                      <a:srgbClr val="FF6200"/>
                     </a:solidFill>
                     <a:lnL>
                       <a:noFill/>
@@ -7500,7 +7500,7 @@
                       <a:r>
                         <a:rPr sz="1300" b="1">
                           <a:solidFill>
-                            <a:srgbClr val="1F1F1F"/>
+                            <a:srgbClr val="FFFFFF"/>
                           </a:solidFill>
                           <a:latin typeface="Calibri"/>
                         </a:rPr>
@@ -7510,7 +7510,7 @@
                   </a:txBody>
                   <a:tcPr marL="91440" marR="91440" marT="41148" marB="41148" anchor="ctr">
                     <a:solidFill>
-                      <a:srgbClr val="EC7000"/>
+                      <a:srgbClr val="FF6200"/>
                     </a:solidFill>
                     <a:lnL>
                       <a:noFill/>
@@ -8022,7 +8022,7 @@
                       <a:r>
                         <a:rPr sz="1300" b="1">
                           <a:solidFill>
-                            <a:srgbClr val="1F1F1F"/>
+                            <a:srgbClr val="FFFFFF"/>
                           </a:solidFill>
                           <a:latin typeface="Calibri"/>
                         </a:rPr>
@@ -8032,7 +8032,7 @@
                   </a:txBody>
                   <a:tcPr marL="91440" marR="91440" marT="41148" marB="41148" anchor="ctr">
                     <a:solidFill>
-                      <a:srgbClr val="EC7000"/>
+                      <a:srgbClr val="FF6200"/>
                     </a:solidFill>
                     <a:lnL>
                       <a:noFill/>
@@ -8071,7 +8071,7 @@
                       <a:r>
                         <a:rPr sz="1300" b="1">
                           <a:solidFill>
-                            <a:srgbClr val="1F1F1F"/>
+                            <a:srgbClr val="FFFFFF"/>
                           </a:solidFill>
                           <a:latin typeface="Calibri"/>
                         </a:rPr>
@@ -8081,7 +8081,7 @@
                   </a:txBody>
                   <a:tcPr marL="91440" marR="91440" marT="41148" marB="41148" anchor="ctr">
                     <a:solidFill>
-                      <a:srgbClr val="EC7000"/>
+                      <a:srgbClr val="FF6200"/>
                     </a:solidFill>
                     <a:lnL>
                       <a:noFill/>
@@ -8593,7 +8593,7 @@
                       <a:r>
                         <a:rPr sz="1300" b="1">
                           <a:solidFill>
-                            <a:srgbClr val="1F1F1F"/>
+                            <a:srgbClr val="FFFFFF"/>
                           </a:solidFill>
                           <a:latin typeface="Calibri"/>
                         </a:rPr>
@@ -8603,7 +8603,7 @@
                   </a:txBody>
                   <a:tcPr marL="91440" marR="91440" marT="41148" marB="41148" anchor="ctr">
                     <a:solidFill>
-                      <a:srgbClr val="EC7000"/>
+                      <a:srgbClr val="FF6200"/>
                     </a:solidFill>
                     <a:lnL>
                       <a:noFill/>
@@ -8642,7 +8642,7 @@
                       <a:r>
                         <a:rPr sz="1300" b="1">
                           <a:solidFill>
-                            <a:srgbClr val="1F1F1F"/>
+                            <a:srgbClr val="FFFFFF"/>
                           </a:solidFill>
                           <a:latin typeface="Calibri"/>
                         </a:rPr>
@@ -8652,7 +8652,7 @@
                   </a:txBody>
                   <a:tcPr marL="91440" marR="91440" marT="41148" marB="41148" anchor="ctr">
                     <a:solidFill>
-                      <a:srgbClr val="EC7000"/>
+                      <a:srgbClr val="FF6200"/>
                     </a:solidFill>
                     <a:lnL>
                       <a:noFill/>
@@ -8766,29 +8766,7 @@
                           </a:solidFill>
                           <a:latin typeface="Calibri"/>
                         </a:rPr>
-                        <a:t>Direitos creditórios / PL e cotas subordinadas / PL; validar ativo elegível, subclasses e fórmula</a:t>
-                      </a:r>
-                    </a:p>
-                    <a:p>
-                      <a:pPr algn="ctr">
-                        <a:lnSpc>
-                          <a:spcPct val="100000"/>
-                        </a:lnSpc>
-                        <a:spcBef>
-                          <a:spcPts val="0"/>
-                        </a:spcBef>
-                        <a:spcAft>
-                          <a:spcPts val="0"/>
-                        </a:spcAft>
-                      </a:pPr>
-                      <a:r>
-                        <a:rPr sz="1300" b="0">
-                          <a:solidFill>
-                            <a:srgbClr val="1F1F1F"/>
-                          </a:solidFill>
-                          <a:latin typeface="Calibri"/>
-                        </a:rPr>
-                        <a:t>contratual</a:t>
+                        <a:t>Direitos creditórios / PL e cotas subordinadas / PL</a:t>
                       </a:r>
                     </a:p>
                   </a:txBody>
@@ -9122,7 +9100,7 @@
                           </a:solidFill>
                           <a:latin typeface="Calibri"/>
                         </a:rPr>
-                        <a:t>Sem competência IME carregada em cache local</a:t>
+                        <a:t>-</a:t>
                       </a:r>
                     </a:p>
                   </a:txBody>
